--- a/6차시_PPT.pptx
+++ b/6차시_PPT.pptx
@@ -15450,7 +15450,7 @@
 </file>
 
 <file path=ppt/slides/slide10.xml><?xml version="1.0" encoding="utf-8"?>
-<p:sld xmlns:a="http://schemas.openxmlformats.org/drawingml/2006/main" xmlns:r="http://schemas.openxmlformats.org/officeDocument/2006/relationships" xmlns:p="http://schemas.openxmlformats.org/presentationml/2006/main">
+<p:sld xmlns:r="http://schemas.openxmlformats.org/officeDocument/2006/relationships" xmlns:c="http://schemas.openxmlformats.org/drawingml/2006/chart" xmlns:a="http://schemas.openxmlformats.org/drawingml/2006/main" xmlns:dgm="http://schemas.openxmlformats.org/drawingml/2006/diagram" xmlns:dsp="http://schemas.microsoft.com/office/drawing/2008/diagram" xmlns:p="http://schemas.openxmlformats.org/presentationml/2006/main">
   <p:cSld>
     <p:spTree>
       <p:nvGrpSpPr>
@@ -15800,7 +15800,7 @@
           <p:nvPr/>
         </p:nvPicPr>
         <p:blipFill rotWithShape="1">
-          <a:blip r:embed="rId3"/>
+          <a:blip r:embed="rId5"/>
           <a:srcRect b="50000"/>
           <a:stretch>
             <a:fillRect/>
@@ -15825,7 +15825,7 @@
           <p:nvPr/>
         </p:nvPicPr>
         <p:blipFill rotWithShape="1">
-          <a:blip r:embed="rId5"/>
+          <a:blip r:embed="rId6"/>
           <a:stretch>
             <a:fillRect/>
           </a:stretch>
@@ -15925,6 +15925,61 @@
               </a:rPr>
               <a:t>누가 남을까?</a:t>
             </a:r>
+          </a:p>
+        </p:txBody>
+      </p:sp>
+      <p:sp>
+        <p:nvSpPr>
+          <p:cNvPr id="28" name="가로 글상자 27"/>
+          <p:cNvSpPr txBox="1"/>
+          <p:nvPr/>
+        </p:nvSpPr>
+        <p:spPr>
+          <a:xfrm>
+            <a:off x="10586085" y="6231011"/>
+            <a:ext cx="1407478" cy="222176"/>
+          </a:xfrm>
+          <a:prstGeom prst="rect">
+            <a:avLst/>
+          </a:prstGeom>
+        </p:spPr>
+        <p:txBody>
+          <a:bodyPr wrap="square">
+            <a:spAutoFit/>
+          </a:bodyPr>
+          <a:p>
+            <a:pPr lvl="0" algn="r">
+              <a:defRPr/>
+            </a:pPr>
+            <a:r>
+              <a:rPr lang="en-US" altLang="ko-KR" sz="900">
+                <a:solidFill>
+                  <a:srgbClr val="f2f2f2"/>
+                </a:solidFill>
+              </a:rPr>
+              <a:t>*</a:t>
+            </a:r>
+            <a:r>
+              <a:rPr lang="ko-KR" altLang="en-US" sz="900">
+                <a:solidFill>
+                  <a:srgbClr val="f2f2f2"/>
+                </a:solidFill>
+              </a:rPr>
+              <a:t>이미지 출처</a:t>
+            </a:r>
+            <a:r>
+              <a:rPr lang="en-US" altLang="ko-KR" sz="900">
+                <a:solidFill>
+                  <a:srgbClr val="f2f2f2"/>
+                </a:solidFill>
+              </a:rPr>
+              <a:t>:FLATICON</a:t>
+            </a:r>
+            <a:endParaRPr lang="ko-KR" altLang="en-US" sz="900">
+              <a:solidFill>
+                <a:srgbClr val="f2f2f2"/>
+              </a:solidFill>
+            </a:endParaRPr>
           </a:p>
         </p:txBody>
       </p:sp>
@@ -16062,7 +16117,7 @@
 </file>
 
 <file path=ppt/slides/slide11.xml><?xml version="1.0" encoding="utf-8"?>
-<p:sld xmlns:a="http://schemas.openxmlformats.org/drawingml/2006/main" xmlns:r="http://schemas.openxmlformats.org/officeDocument/2006/relationships" xmlns:p="http://schemas.openxmlformats.org/presentationml/2006/main">
+<p:sld xmlns:r="http://schemas.openxmlformats.org/officeDocument/2006/relationships" xmlns:c="http://schemas.openxmlformats.org/drawingml/2006/chart" xmlns:a="http://schemas.openxmlformats.org/drawingml/2006/main" xmlns:dgm="http://schemas.openxmlformats.org/drawingml/2006/diagram" xmlns:dsp="http://schemas.microsoft.com/office/drawing/2008/diagram" xmlns:p="http://schemas.openxmlformats.org/presentationml/2006/main">
   <p:cSld>
     <p:spTree>
       <p:nvGrpSpPr>
@@ -16348,7 +16403,7 @@
           <p:nvPr/>
         </p:nvPicPr>
         <p:blipFill rotWithShape="1">
-          <a:blip r:embed="rId3"/>
+          <a:blip r:embed="rId4"/>
           <a:srcRect t="51016" b="878"/>
           <a:stretch>
             <a:fillRect/>
@@ -16373,7 +16428,7 @@
           <p:nvPr/>
         </p:nvPicPr>
         <p:blipFill rotWithShape="1">
-          <a:blip r:embed="rId4"/>
+          <a:blip r:embed="rId5"/>
           <a:stretch>
             <a:fillRect/>
           </a:stretch>
@@ -16397,7 +16452,7 @@
           <p:nvPr/>
         </p:nvPicPr>
         <p:blipFill rotWithShape="1">
-          <a:blip r:embed="rId5"/>
+          <a:blip r:embed="rId6"/>
           <a:stretch>
             <a:fillRect/>
           </a:stretch>
@@ -16457,6 +16512,61 @@
               </a:rPr>
               <a:t>누가 남을까?</a:t>
             </a:r>
+          </a:p>
+        </p:txBody>
+      </p:sp>
+      <p:sp>
+        <p:nvSpPr>
+          <p:cNvPr id="21" name="가로 글상자 20"/>
+          <p:cNvSpPr txBox="1"/>
+          <p:nvPr/>
+        </p:nvSpPr>
+        <p:spPr>
+          <a:xfrm>
+            <a:off x="10586085" y="6231011"/>
+            <a:ext cx="1407478" cy="222176"/>
+          </a:xfrm>
+          <a:prstGeom prst="rect">
+            <a:avLst/>
+          </a:prstGeom>
+        </p:spPr>
+        <p:txBody>
+          <a:bodyPr wrap="square">
+            <a:spAutoFit/>
+          </a:bodyPr>
+          <a:p>
+            <a:pPr lvl="0" algn="r">
+              <a:defRPr/>
+            </a:pPr>
+            <a:r>
+              <a:rPr lang="en-US" altLang="ko-KR" sz="900">
+                <a:solidFill>
+                  <a:srgbClr val="f2f2f2"/>
+                </a:solidFill>
+              </a:rPr>
+              <a:t>*</a:t>
+            </a:r>
+            <a:r>
+              <a:rPr lang="ko-KR" altLang="en-US" sz="900">
+                <a:solidFill>
+                  <a:srgbClr val="f2f2f2"/>
+                </a:solidFill>
+              </a:rPr>
+              <a:t>이미지 출처</a:t>
+            </a:r>
+            <a:r>
+              <a:rPr lang="en-US" altLang="ko-KR" sz="900">
+                <a:solidFill>
+                  <a:srgbClr val="f2f2f2"/>
+                </a:solidFill>
+              </a:rPr>
+              <a:t>:FLATICON</a:t>
+            </a:r>
+            <a:endParaRPr lang="ko-KR" altLang="en-US" sz="900">
+              <a:solidFill>
+                <a:srgbClr val="f2f2f2"/>
+              </a:solidFill>
+            </a:endParaRPr>
           </a:p>
         </p:txBody>
       </p:sp>
@@ -16594,7 +16704,7 @@
 </file>
 
 <file path=ppt/slides/slide12.xml><?xml version="1.0" encoding="utf-8"?>
-<p:sld xmlns:a="http://schemas.openxmlformats.org/drawingml/2006/main" xmlns:r="http://schemas.openxmlformats.org/officeDocument/2006/relationships" xmlns:p="http://schemas.openxmlformats.org/presentationml/2006/main">
+<p:sld xmlns:r="http://schemas.openxmlformats.org/officeDocument/2006/relationships" xmlns:c="http://schemas.openxmlformats.org/drawingml/2006/chart" xmlns:a="http://schemas.openxmlformats.org/drawingml/2006/main" xmlns:dgm="http://schemas.openxmlformats.org/drawingml/2006/diagram" xmlns:dsp="http://schemas.microsoft.com/office/drawing/2008/diagram" xmlns:p="http://schemas.openxmlformats.org/presentationml/2006/main">
   <p:cSld>
     <p:spTree>
       <p:nvGrpSpPr>
@@ -16904,7 +17014,7 @@
           <p:nvPr/>
         </p:nvPicPr>
         <p:blipFill rotWithShape="1">
-          <a:blip r:embed="rId3"/>
+          <a:blip r:embed="rId5"/>
           <a:srcRect b="51894"/>
           <a:stretch>
             <a:fillRect/>
@@ -17005,6 +17115,61 @@
               </a:rPr>
               <a:t>누가 남을까?</a:t>
             </a:r>
+          </a:p>
+        </p:txBody>
+      </p:sp>
+      <p:sp>
+        <p:nvSpPr>
+          <p:cNvPr id="23" name="가로 글상자 22"/>
+          <p:cNvSpPr txBox="1"/>
+          <p:nvPr/>
+        </p:nvSpPr>
+        <p:spPr>
+          <a:xfrm>
+            <a:off x="10586085" y="6231011"/>
+            <a:ext cx="1407478" cy="222176"/>
+          </a:xfrm>
+          <a:prstGeom prst="rect">
+            <a:avLst/>
+          </a:prstGeom>
+        </p:spPr>
+        <p:txBody>
+          <a:bodyPr wrap="square">
+            <a:spAutoFit/>
+          </a:bodyPr>
+          <a:p>
+            <a:pPr lvl="0" algn="r">
+              <a:defRPr/>
+            </a:pPr>
+            <a:r>
+              <a:rPr lang="en-US" altLang="ko-KR" sz="900">
+                <a:solidFill>
+                  <a:srgbClr val="f2f2f2"/>
+                </a:solidFill>
+              </a:rPr>
+              <a:t>*</a:t>
+            </a:r>
+            <a:r>
+              <a:rPr lang="ko-KR" altLang="en-US" sz="900">
+                <a:solidFill>
+                  <a:srgbClr val="f2f2f2"/>
+                </a:solidFill>
+              </a:rPr>
+              <a:t>이미지 출처</a:t>
+            </a:r>
+            <a:r>
+              <a:rPr lang="en-US" altLang="ko-KR" sz="900">
+                <a:solidFill>
+                  <a:srgbClr val="f2f2f2"/>
+                </a:solidFill>
+              </a:rPr>
+              <a:t>:FLATICON</a:t>
+            </a:r>
+            <a:endParaRPr lang="ko-KR" altLang="en-US" sz="900">
+              <a:solidFill>
+                <a:srgbClr val="f2f2f2"/>
+              </a:solidFill>
+            </a:endParaRPr>
           </a:p>
         </p:txBody>
       </p:sp>
@@ -17097,7 +17262,7 @@
 </file>
 
 <file path=ppt/slides/slide13.xml><?xml version="1.0" encoding="utf-8"?>
-<p:sld xmlns:a="http://schemas.openxmlformats.org/drawingml/2006/main" xmlns:r="http://schemas.openxmlformats.org/officeDocument/2006/relationships" xmlns:p="http://schemas.openxmlformats.org/presentationml/2006/main">
+<p:sld xmlns:r="http://schemas.openxmlformats.org/officeDocument/2006/relationships" xmlns:c="http://schemas.openxmlformats.org/drawingml/2006/chart" xmlns:a="http://schemas.openxmlformats.org/drawingml/2006/main" xmlns:dgm="http://schemas.openxmlformats.org/drawingml/2006/diagram" xmlns:dsp="http://schemas.microsoft.com/office/drawing/2008/diagram" xmlns:p="http://schemas.openxmlformats.org/presentationml/2006/main">
   <p:cSld>
     <p:spTree>
       <p:nvGrpSpPr>
@@ -17383,7 +17548,7 @@
           <p:nvPr/>
         </p:nvPicPr>
         <p:blipFill rotWithShape="1">
-          <a:blip r:embed="rId3"/>
+          <a:blip r:embed="rId4"/>
           <a:srcRect l="125" t="51862" r="-125" b="-811"/>
           <a:stretch>
             <a:fillRect/>
@@ -17408,7 +17573,7 @@
           <p:nvPr/>
         </p:nvPicPr>
         <p:blipFill rotWithShape="1">
-          <a:blip r:embed="rId4"/>
+          <a:blip r:embed="rId5"/>
           <a:stretch>
             <a:fillRect/>
           </a:stretch>
@@ -17432,7 +17597,7 @@
           <p:nvPr/>
         </p:nvPicPr>
         <p:blipFill rotWithShape="1">
-          <a:blip r:embed="rId5"/>
+          <a:blip r:embed="rId6"/>
           <a:stretch>
             <a:fillRect/>
           </a:stretch>
@@ -17492,6 +17657,61 @@
               </a:rPr>
               <a:t>누가 남을까?</a:t>
             </a:r>
+          </a:p>
+        </p:txBody>
+      </p:sp>
+      <p:sp>
+        <p:nvSpPr>
+          <p:cNvPr id="17" name="가로 글상자 16"/>
+          <p:cNvSpPr txBox="1"/>
+          <p:nvPr/>
+        </p:nvSpPr>
+        <p:spPr>
+          <a:xfrm>
+            <a:off x="10586085" y="6231011"/>
+            <a:ext cx="1407478" cy="222176"/>
+          </a:xfrm>
+          <a:prstGeom prst="rect">
+            <a:avLst/>
+          </a:prstGeom>
+        </p:spPr>
+        <p:txBody>
+          <a:bodyPr wrap="square">
+            <a:spAutoFit/>
+          </a:bodyPr>
+          <a:p>
+            <a:pPr lvl="0" algn="r">
+              <a:defRPr/>
+            </a:pPr>
+            <a:r>
+              <a:rPr lang="en-US" altLang="ko-KR" sz="900">
+                <a:solidFill>
+                  <a:srgbClr val="f2f2f2"/>
+                </a:solidFill>
+              </a:rPr>
+              <a:t>*</a:t>
+            </a:r>
+            <a:r>
+              <a:rPr lang="ko-KR" altLang="en-US" sz="900">
+                <a:solidFill>
+                  <a:srgbClr val="f2f2f2"/>
+                </a:solidFill>
+              </a:rPr>
+              <a:t>이미지 출처</a:t>
+            </a:r>
+            <a:r>
+              <a:rPr lang="en-US" altLang="ko-KR" sz="900">
+                <a:solidFill>
+                  <a:srgbClr val="f2f2f2"/>
+                </a:solidFill>
+              </a:rPr>
+              <a:t>:FLATICON</a:t>
+            </a:r>
+            <a:endParaRPr lang="ko-KR" altLang="en-US" sz="900">
+              <a:solidFill>
+                <a:srgbClr val="f2f2f2"/>
+              </a:solidFill>
+            </a:endParaRPr>
           </a:p>
         </p:txBody>
       </p:sp>
@@ -17629,7 +17849,7 @@
 </file>
 
 <file path=ppt/slides/slide14.xml><?xml version="1.0" encoding="utf-8"?>
-<p:sld xmlns:a="http://schemas.openxmlformats.org/drawingml/2006/main" xmlns:r="http://schemas.openxmlformats.org/officeDocument/2006/relationships" xmlns:p="http://schemas.openxmlformats.org/presentationml/2006/main">
+<p:sld xmlns:r="http://schemas.openxmlformats.org/officeDocument/2006/relationships" xmlns:c="http://schemas.openxmlformats.org/drawingml/2006/chart" xmlns:a="http://schemas.openxmlformats.org/drawingml/2006/main" xmlns:dgm="http://schemas.openxmlformats.org/drawingml/2006/diagram" xmlns:dsp="http://schemas.microsoft.com/office/drawing/2008/diagram" xmlns:p="http://schemas.openxmlformats.org/presentationml/2006/main">
   <p:cSld>
     <p:spTree>
       <p:nvGrpSpPr>
@@ -17939,7 +18159,7 @@
           <p:nvPr/>
         </p:nvPicPr>
         <p:blipFill rotWithShape="1">
-          <a:blip r:embed="rId3"/>
+          <a:blip r:embed="rId5"/>
           <a:srcRect b="51051"/>
           <a:stretch>
             <a:fillRect/>
@@ -18026,6 +18246,61 @@
               </a:rPr>
               <a:t>&lt;활동1&gt;누가 남을까?</a:t>
             </a:r>
+          </a:p>
+        </p:txBody>
+      </p:sp>
+      <p:sp>
+        <p:nvSpPr>
+          <p:cNvPr id="19" name="가로 글상자 18"/>
+          <p:cNvSpPr txBox="1"/>
+          <p:nvPr/>
+        </p:nvSpPr>
+        <p:spPr>
+          <a:xfrm>
+            <a:off x="10586085" y="6231011"/>
+            <a:ext cx="1407478" cy="222176"/>
+          </a:xfrm>
+          <a:prstGeom prst="rect">
+            <a:avLst/>
+          </a:prstGeom>
+        </p:spPr>
+        <p:txBody>
+          <a:bodyPr wrap="square">
+            <a:spAutoFit/>
+          </a:bodyPr>
+          <a:p>
+            <a:pPr lvl="0" algn="r">
+              <a:defRPr/>
+            </a:pPr>
+            <a:r>
+              <a:rPr lang="en-US" altLang="ko-KR" sz="900">
+                <a:solidFill>
+                  <a:srgbClr val="f2f2f2"/>
+                </a:solidFill>
+              </a:rPr>
+              <a:t>*</a:t>
+            </a:r>
+            <a:r>
+              <a:rPr lang="ko-KR" altLang="en-US" sz="900">
+                <a:solidFill>
+                  <a:srgbClr val="f2f2f2"/>
+                </a:solidFill>
+              </a:rPr>
+              <a:t>이미지 출처</a:t>
+            </a:r>
+            <a:r>
+              <a:rPr lang="en-US" altLang="ko-KR" sz="900">
+                <a:solidFill>
+                  <a:srgbClr val="f2f2f2"/>
+                </a:solidFill>
+              </a:rPr>
+              <a:t>:FLATICON</a:t>
+            </a:r>
+            <a:endParaRPr lang="ko-KR" altLang="en-US" sz="900">
+              <a:solidFill>
+                <a:srgbClr val="f2f2f2"/>
+              </a:solidFill>
+            </a:endParaRPr>
           </a:p>
         </p:txBody>
       </p:sp>
@@ -20063,7 +20338,7 @@
 </file>
 
 <file path=ppt/slides/slide19.xml><?xml version="1.0" encoding="utf-8"?>
-<p:sld xmlns:a="http://schemas.openxmlformats.org/drawingml/2006/main" xmlns:r="http://schemas.openxmlformats.org/officeDocument/2006/relationships" xmlns:p="http://schemas.openxmlformats.org/presentationml/2006/main">
+<p:sld xmlns:r="http://schemas.openxmlformats.org/officeDocument/2006/relationships" xmlns:c="http://schemas.openxmlformats.org/drawingml/2006/chart" xmlns:a="http://schemas.openxmlformats.org/drawingml/2006/main" xmlns:dgm="http://schemas.openxmlformats.org/drawingml/2006/diagram" xmlns:dsp="http://schemas.microsoft.com/office/drawing/2008/diagram" xmlns:p="http://schemas.openxmlformats.org/presentationml/2006/main">
   <p:cSld>
     <p:spTree>
       <p:nvGrpSpPr>
@@ -20373,6 +20648,53 @@
           </a:prstGeom>
         </p:spPr>
       </p:pic>
+      <p:sp>
+        <p:nvSpPr>
+          <p:cNvPr id="11" name="가로 글상자 10"/>
+          <p:cNvSpPr txBox="1"/>
+          <p:nvPr/>
+        </p:nvSpPr>
+        <p:spPr>
+          <a:xfrm>
+            <a:off x="11047969" y="6173861"/>
+            <a:ext cx="945594" cy="222176"/>
+          </a:xfrm>
+          <a:prstGeom prst="rect">
+            <a:avLst/>
+          </a:prstGeom>
+        </p:spPr>
+        <p:txBody>
+          <a:bodyPr wrap="square">
+            <a:spAutoFit/>
+          </a:bodyPr>
+          <a:p>
+            <a:pPr lvl="0" algn="r">
+              <a:defRPr/>
+            </a:pPr>
+            <a:r>
+              <a:rPr lang="en-US" altLang="ko-KR" sz="900">
+                <a:solidFill>
+                  <a:srgbClr val="f2f2f2"/>
+                </a:solidFill>
+              </a:rPr>
+              <a:t>AI</a:t>
+            </a:r>
+            <a:r>
+              <a:rPr lang="ko-KR" altLang="en-US" sz="900">
+                <a:solidFill>
+                  <a:srgbClr val="f2f2f2"/>
+                </a:solidFill>
+              </a:rPr>
+              <a:t> 생성 이미지</a:t>
+            </a:r>
+            <a:endParaRPr lang="ko-KR" altLang="en-US" sz="900">
+              <a:solidFill>
+                <a:srgbClr val="f2f2f2"/>
+              </a:solidFill>
+            </a:endParaRPr>
+          </a:p>
+        </p:txBody>
+      </p:sp>
     </p:spTree>
     <p:extLst>
       <p:ext uri="{BB962C8B-B14F-4D97-AF65-F5344CB8AC3E}">
@@ -20387,14 +20709,13 @@
 </file>
 
 <file path=ppt/slides/slide2.xml><?xml version="1.0" encoding="utf-8"?>
-<p:sld xmlns:a="http://schemas.openxmlformats.org/drawingml/2006/main" xmlns:r="http://schemas.openxmlformats.org/officeDocument/2006/relationships" xmlns:p="http://schemas.openxmlformats.org/presentationml/2006/main">
+<p:sld xmlns:r="http://schemas.openxmlformats.org/officeDocument/2006/relationships" xmlns:c="http://schemas.openxmlformats.org/drawingml/2006/chart" xmlns:a="http://schemas.openxmlformats.org/drawingml/2006/main" xmlns:dgm="http://schemas.openxmlformats.org/drawingml/2006/diagram" xmlns:dsp="http://schemas.microsoft.com/office/drawing/2008/diagram" xmlns:p="http://schemas.openxmlformats.org/presentationml/2006/main">
   <p:cSld>
     <p:bg>
-      <p:bgPr>
+      <p:bgPr shadeToTitle="0">
         <a:solidFill>
-          <a:srgbClr val="FFF7CC"/>
+          <a:srgbClr val="fff7cc"/>
         </a:solidFill>
-        <a:effectLst/>
       </p:bgPr>
     </p:bg>
     <p:spTree>
@@ -20531,6 +20852,53 @@
           </a:prstGeom>
         </p:spPr>
       </p:pic>
+      <p:sp>
+        <p:nvSpPr>
+          <p:cNvPr id="15" name="가로 글상자 14"/>
+          <p:cNvSpPr txBox="1"/>
+          <p:nvPr/>
+        </p:nvSpPr>
+        <p:spPr>
+          <a:xfrm>
+            <a:off x="7847428" y="5746136"/>
+            <a:ext cx="4128542" cy="224133"/>
+          </a:xfrm>
+          <a:prstGeom prst="rect">
+            <a:avLst/>
+          </a:prstGeom>
+        </p:spPr>
+        <p:txBody>
+          <a:bodyPr wrap="square">
+            <a:spAutoFit/>
+          </a:bodyPr>
+          <a:p>
+            <a:pPr lvl="0" algn="r">
+              <a:defRPr/>
+            </a:pPr>
+            <a:r>
+              <a:rPr lang="en-US" altLang="ko-KR" sz="900">
+                <a:solidFill>
+                  <a:srgbClr val="f2f2f2"/>
+                </a:solidFill>
+              </a:rPr>
+              <a:t>AI</a:t>
+            </a:r>
+            <a:r>
+              <a:rPr lang="ko-KR" altLang="en-US" sz="900">
+                <a:solidFill>
+                  <a:srgbClr val="f2f2f2"/>
+                </a:solidFill>
+              </a:rPr>
+              <a:t> 생성 이미지</a:t>
+            </a:r>
+            <a:endParaRPr lang="ko-KR" altLang="en-US" sz="900">
+              <a:solidFill>
+                <a:srgbClr val="f2f2f2"/>
+              </a:solidFill>
+            </a:endParaRPr>
+          </a:p>
+        </p:txBody>
+      </p:sp>
     </p:spTree>
     <p:extLst>
       <p:ext uri="{BB962C8B-B14F-4D97-AF65-F5344CB8AC3E}">
@@ -20545,7 +20913,7 @@
 </file>
 
 <file path=ppt/slides/slide20.xml><?xml version="1.0" encoding="utf-8"?>
-<p:sld xmlns:a="http://schemas.openxmlformats.org/drawingml/2006/main" xmlns:r="http://schemas.openxmlformats.org/officeDocument/2006/relationships" xmlns:p="http://schemas.openxmlformats.org/presentationml/2006/main">
+<p:sld xmlns:r="http://schemas.openxmlformats.org/officeDocument/2006/relationships" xmlns:c="http://schemas.openxmlformats.org/drawingml/2006/chart" xmlns:a="http://schemas.openxmlformats.org/drawingml/2006/main" xmlns:dgm="http://schemas.openxmlformats.org/drawingml/2006/diagram" xmlns:dsp="http://schemas.microsoft.com/office/drawing/2008/diagram" xmlns:p="http://schemas.openxmlformats.org/presentationml/2006/main">
   <p:cSld>
     <p:spTree>
       <p:nvGrpSpPr>
@@ -21020,6 +21388,53 @@
           </a:prstGeom>
         </p:spPr>
       </p:pic>
+      <p:sp>
+        <p:nvSpPr>
+          <p:cNvPr id="19" name="가로 글상자 18"/>
+          <p:cNvSpPr txBox="1"/>
+          <p:nvPr/>
+        </p:nvSpPr>
+        <p:spPr>
+          <a:xfrm>
+            <a:off x="11047969" y="6173861"/>
+            <a:ext cx="945594" cy="222176"/>
+          </a:xfrm>
+          <a:prstGeom prst="rect">
+            <a:avLst/>
+          </a:prstGeom>
+        </p:spPr>
+        <p:txBody>
+          <a:bodyPr wrap="square">
+            <a:spAutoFit/>
+          </a:bodyPr>
+          <a:p>
+            <a:pPr lvl="0" algn="r">
+              <a:defRPr/>
+            </a:pPr>
+            <a:r>
+              <a:rPr lang="en-US" altLang="ko-KR" sz="900">
+                <a:solidFill>
+                  <a:srgbClr val="f2f2f2"/>
+                </a:solidFill>
+              </a:rPr>
+              <a:t>AI</a:t>
+            </a:r>
+            <a:r>
+              <a:rPr lang="ko-KR" altLang="en-US" sz="900">
+                <a:solidFill>
+                  <a:srgbClr val="f2f2f2"/>
+                </a:solidFill>
+              </a:rPr>
+              <a:t> 생성 이미지</a:t>
+            </a:r>
+            <a:endParaRPr lang="ko-KR" altLang="en-US" sz="900">
+              <a:solidFill>
+                <a:srgbClr val="f2f2f2"/>
+              </a:solidFill>
+            </a:endParaRPr>
+          </a:p>
+        </p:txBody>
+      </p:sp>
     </p:spTree>
     <p:extLst>
       <p:ext uri="{BB962C8B-B14F-4D97-AF65-F5344CB8AC3E}">
@@ -21513,7 +21928,7 @@
 </file>
 
 <file path=ppt/slides/slide3.xml><?xml version="1.0" encoding="utf-8"?>
-<p:sld xmlns:a="http://schemas.openxmlformats.org/drawingml/2006/main" xmlns:r="http://schemas.openxmlformats.org/officeDocument/2006/relationships" xmlns:p="http://schemas.openxmlformats.org/presentationml/2006/main">
+<p:sld xmlns:r="http://schemas.openxmlformats.org/officeDocument/2006/relationships" xmlns:c="http://schemas.openxmlformats.org/drawingml/2006/chart" xmlns:a="http://schemas.openxmlformats.org/drawingml/2006/main" xmlns:dgm="http://schemas.openxmlformats.org/drawingml/2006/diagram" xmlns:dsp="http://schemas.microsoft.com/office/drawing/2008/diagram" xmlns:p="http://schemas.openxmlformats.org/presentationml/2006/main">
   <p:cSld>
     <p:spTree>
       <p:nvGrpSpPr>
@@ -21854,6 +22269,61 @@
           </a:prstGeom>
         </p:spPr>
       </p:pic>
+      <p:sp>
+        <p:nvSpPr>
+          <p:cNvPr id="12" name="가로 글상자 11"/>
+          <p:cNvSpPr txBox="1"/>
+          <p:nvPr/>
+        </p:nvSpPr>
+        <p:spPr>
+          <a:xfrm>
+            <a:off x="10586085" y="6231011"/>
+            <a:ext cx="1407478" cy="222176"/>
+          </a:xfrm>
+          <a:prstGeom prst="rect">
+            <a:avLst/>
+          </a:prstGeom>
+        </p:spPr>
+        <p:txBody>
+          <a:bodyPr wrap="square">
+            <a:spAutoFit/>
+          </a:bodyPr>
+          <a:p>
+            <a:pPr lvl="0" algn="r">
+              <a:defRPr/>
+            </a:pPr>
+            <a:r>
+              <a:rPr lang="en-US" altLang="ko-KR" sz="900">
+                <a:solidFill>
+                  <a:srgbClr val="f2f2f2"/>
+                </a:solidFill>
+              </a:rPr>
+              <a:t>*</a:t>
+            </a:r>
+            <a:r>
+              <a:rPr lang="ko-KR" altLang="en-US" sz="900">
+                <a:solidFill>
+                  <a:srgbClr val="f2f2f2"/>
+                </a:solidFill>
+              </a:rPr>
+              <a:t>이미지 출처</a:t>
+            </a:r>
+            <a:r>
+              <a:rPr lang="en-US" altLang="ko-KR" sz="900">
+                <a:solidFill>
+                  <a:srgbClr val="f2f2f2"/>
+                </a:solidFill>
+              </a:rPr>
+              <a:t>:FLATICON</a:t>
+            </a:r>
+            <a:endParaRPr lang="ko-KR" altLang="en-US" sz="900">
+              <a:solidFill>
+                <a:srgbClr val="f2f2f2"/>
+              </a:solidFill>
+            </a:endParaRPr>
+          </a:p>
+        </p:txBody>
+      </p:sp>
     </p:spTree>
     <p:extLst>
       <p:ext uri="{BB962C8B-B14F-4D97-AF65-F5344CB8AC3E}">
@@ -21868,7 +22338,7 @@
 </file>
 
 <file path=ppt/slides/slide4.xml><?xml version="1.0" encoding="utf-8"?>
-<p:sld xmlns:a="http://schemas.openxmlformats.org/drawingml/2006/main" xmlns:r="http://schemas.openxmlformats.org/officeDocument/2006/relationships" xmlns:p="http://schemas.openxmlformats.org/presentationml/2006/main">
+<p:sld xmlns:r="http://schemas.openxmlformats.org/officeDocument/2006/relationships" xmlns:c="http://schemas.openxmlformats.org/drawingml/2006/chart" xmlns:a="http://schemas.openxmlformats.org/drawingml/2006/main" xmlns:dgm="http://schemas.openxmlformats.org/drawingml/2006/diagram" xmlns:dsp="http://schemas.microsoft.com/office/drawing/2008/diagram" xmlns:p="http://schemas.openxmlformats.org/presentationml/2006/main">
   <p:cSld>
     <p:spTree>
       <p:nvGrpSpPr>
@@ -22195,7 +22665,7 @@
           <p:nvPr/>
         </p:nvPicPr>
         <p:blipFill rotWithShape="1">
-          <a:blip r:embed="rId3"/>
+          <a:blip r:embed="rId4"/>
           <a:srcRect l="-76" t="51362" r="76" b="-387"/>
           <a:stretch>
             <a:fillRect/>
@@ -22220,7 +22690,7 @@
           <p:nvPr/>
         </p:nvPicPr>
         <p:blipFill rotWithShape="1">
-          <a:blip r:embed="rId4"/>
+          <a:blip r:embed="rId5"/>
           <a:stretch>
             <a:fillRect/>
           </a:stretch>
@@ -22244,7 +22714,7 @@
           <p:nvPr/>
         </p:nvPicPr>
         <p:blipFill rotWithShape="1">
-          <a:blip r:embed="rId5"/>
+          <a:blip r:embed="rId6"/>
           <a:stretch>
             <a:fillRect/>
           </a:stretch>
@@ -22259,6 +22729,61 @@
           </a:prstGeom>
         </p:spPr>
       </p:pic>
+      <p:sp>
+        <p:nvSpPr>
+          <p:cNvPr id="16" name="가로 글상자 15"/>
+          <p:cNvSpPr txBox="1"/>
+          <p:nvPr/>
+        </p:nvSpPr>
+        <p:spPr>
+          <a:xfrm>
+            <a:off x="9227602" y="6196891"/>
+            <a:ext cx="1407478" cy="222176"/>
+          </a:xfrm>
+          <a:prstGeom prst="rect">
+            <a:avLst/>
+          </a:prstGeom>
+        </p:spPr>
+        <p:txBody>
+          <a:bodyPr wrap="square">
+            <a:spAutoFit/>
+          </a:bodyPr>
+          <a:p>
+            <a:pPr lvl="0" algn="r">
+              <a:defRPr/>
+            </a:pPr>
+            <a:r>
+              <a:rPr lang="en-US" altLang="ko-KR" sz="900">
+                <a:solidFill>
+                  <a:srgbClr val="f2f2f2"/>
+                </a:solidFill>
+              </a:rPr>
+              <a:t>*</a:t>
+            </a:r>
+            <a:r>
+              <a:rPr lang="ko-KR" altLang="en-US" sz="900">
+                <a:solidFill>
+                  <a:srgbClr val="f2f2f2"/>
+                </a:solidFill>
+              </a:rPr>
+              <a:t>이미지 출처</a:t>
+            </a:r>
+            <a:r>
+              <a:rPr lang="en-US" altLang="ko-KR" sz="900">
+                <a:solidFill>
+                  <a:srgbClr val="f2f2f2"/>
+                </a:solidFill>
+              </a:rPr>
+              <a:t>:FLATICON</a:t>
+            </a:r>
+            <a:endParaRPr lang="ko-KR" altLang="en-US" sz="900">
+              <a:solidFill>
+                <a:srgbClr val="f2f2f2"/>
+              </a:solidFill>
+            </a:endParaRPr>
+          </a:p>
+        </p:txBody>
+      </p:sp>
     </p:spTree>
     <p:extLst>
       <p:ext uri="{BB962C8B-B14F-4D97-AF65-F5344CB8AC3E}">
@@ -23056,7 +23581,7 @@
 </file>
 
 <file path=ppt/slides/slide6.xml><?xml version="1.0" encoding="utf-8"?>
-<p:sld xmlns:a="http://schemas.openxmlformats.org/drawingml/2006/main" xmlns:r="http://schemas.openxmlformats.org/officeDocument/2006/relationships" xmlns:p="http://schemas.openxmlformats.org/presentationml/2006/main">
+<p:sld xmlns:r="http://schemas.openxmlformats.org/officeDocument/2006/relationships" xmlns:c="http://schemas.openxmlformats.org/drawingml/2006/chart" xmlns:a="http://schemas.openxmlformats.org/drawingml/2006/main" xmlns:dgm="http://schemas.openxmlformats.org/drawingml/2006/diagram" xmlns:dsp="http://schemas.microsoft.com/office/drawing/2008/diagram" xmlns:p="http://schemas.openxmlformats.org/presentationml/2006/main">
   <p:cSld>
     <p:spTree>
       <p:nvGrpSpPr>
@@ -23602,6 +24127,61 @@
           </a:prstGeom>
         </p:spPr>
       </p:pic>
+      <p:sp>
+        <p:nvSpPr>
+          <p:cNvPr id="21" name="가로 글상자 20"/>
+          <p:cNvSpPr txBox="1"/>
+          <p:nvPr/>
+        </p:nvSpPr>
+        <p:spPr>
+          <a:xfrm>
+            <a:off x="10586085" y="6231011"/>
+            <a:ext cx="1407478" cy="222176"/>
+          </a:xfrm>
+          <a:prstGeom prst="rect">
+            <a:avLst/>
+          </a:prstGeom>
+        </p:spPr>
+        <p:txBody>
+          <a:bodyPr wrap="square">
+            <a:spAutoFit/>
+          </a:bodyPr>
+          <a:p>
+            <a:pPr lvl="0" algn="r">
+              <a:defRPr/>
+            </a:pPr>
+            <a:r>
+              <a:rPr lang="en-US" altLang="ko-KR" sz="900">
+                <a:solidFill>
+                  <a:srgbClr val="f2f2f2"/>
+                </a:solidFill>
+              </a:rPr>
+              <a:t>*</a:t>
+            </a:r>
+            <a:r>
+              <a:rPr lang="ko-KR" altLang="en-US" sz="900">
+                <a:solidFill>
+                  <a:srgbClr val="f2f2f2"/>
+                </a:solidFill>
+              </a:rPr>
+              <a:t>이미지 출처</a:t>
+            </a:r>
+            <a:r>
+              <a:rPr lang="en-US" altLang="ko-KR" sz="900">
+                <a:solidFill>
+                  <a:srgbClr val="f2f2f2"/>
+                </a:solidFill>
+              </a:rPr>
+              <a:t>:FLATICON</a:t>
+            </a:r>
+            <a:endParaRPr lang="ko-KR" altLang="en-US" sz="900">
+              <a:solidFill>
+                <a:srgbClr val="f2f2f2"/>
+              </a:solidFill>
+            </a:endParaRPr>
+          </a:p>
+        </p:txBody>
+      </p:sp>
     </p:spTree>
     <p:extLst>
       <p:ext uri="{BB962C8B-B14F-4D97-AF65-F5344CB8AC3E}">
@@ -23616,7 +24196,7 @@
 </file>
 
 <file path=ppt/slides/slide7.xml><?xml version="1.0" encoding="utf-8"?>
-<p:sld xmlns:a="http://schemas.openxmlformats.org/drawingml/2006/main" xmlns:r="http://schemas.openxmlformats.org/officeDocument/2006/relationships" xmlns:p="http://schemas.openxmlformats.org/presentationml/2006/main">
+<p:sld xmlns:r="http://schemas.openxmlformats.org/officeDocument/2006/relationships" xmlns:c="http://schemas.openxmlformats.org/drawingml/2006/chart" xmlns:a="http://schemas.openxmlformats.org/drawingml/2006/main" xmlns:dgm="http://schemas.openxmlformats.org/drawingml/2006/diagram" xmlns:dsp="http://schemas.microsoft.com/office/drawing/2008/diagram" xmlns:p="http://schemas.openxmlformats.org/presentationml/2006/main">
   <p:cSld>
     <p:spTree>
       <p:nvGrpSpPr>
@@ -23950,7 +24530,7 @@
           <p:nvPr/>
         </p:nvPicPr>
         <p:blipFill rotWithShape="1">
-          <a:blip r:embed="rId3"/>
+          <a:blip r:embed="rId4"/>
           <a:srcRect l="-76" t="51362" r="76" b="-387"/>
           <a:stretch>
             <a:fillRect/>
@@ -23975,7 +24555,7 @@
           <p:nvPr/>
         </p:nvPicPr>
         <p:blipFill rotWithShape="1">
-          <a:blip r:embed="rId4"/>
+          <a:blip r:embed="rId5"/>
           <a:stretch>
             <a:fillRect/>
           </a:stretch>
@@ -23999,7 +24579,7 @@
           <p:nvPr/>
         </p:nvPicPr>
         <p:blipFill rotWithShape="1">
-          <a:blip r:embed="rId5"/>
+          <a:blip r:embed="rId6"/>
           <a:stretch>
             <a:fillRect/>
           </a:stretch>
@@ -24014,6 +24594,61 @@
           </a:prstGeom>
         </p:spPr>
       </p:pic>
+      <p:sp>
+        <p:nvSpPr>
+          <p:cNvPr id="19" name="가로 글상자 18"/>
+          <p:cNvSpPr txBox="1"/>
+          <p:nvPr/>
+        </p:nvSpPr>
+        <p:spPr>
+          <a:xfrm>
+            <a:off x="9493052" y="6196891"/>
+            <a:ext cx="1407478" cy="222176"/>
+          </a:xfrm>
+          <a:prstGeom prst="rect">
+            <a:avLst/>
+          </a:prstGeom>
+        </p:spPr>
+        <p:txBody>
+          <a:bodyPr wrap="square">
+            <a:spAutoFit/>
+          </a:bodyPr>
+          <a:p>
+            <a:pPr lvl="0" algn="r">
+              <a:defRPr/>
+            </a:pPr>
+            <a:r>
+              <a:rPr lang="en-US" altLang="ko-KR" sz="900">
+                <a:solidFill>
+                  <a:srgbClr val="f2f2f2"/>
+                </a:solidFill>
+              </a:rPr>
+              <a:t>*</a:t>
+            </a:r>
+            <a:r>
+              <a:rPr lang="ko-KR" altLang="en-US" sz="900">
+                <a:solidFill>
+                  <a:srgbClr val="f2f2f2"/>
+                </a:solidFill>
+              </a:rPr>
+              <a:t>이미지 출처</a:t>
+            </a:r>
+            <a:r>
+              <a:rPr lang="en-US" altLang="ko-KR" sz="900">
+                <a:solidFill>
+                  <a:srgbClr val="f2f2f2"/>
+                </a:solidFill>
+              </a:rPr>
+              <a:t>:FLATICON</a:t>
+            </a:r>
+            <a:endParaRPr lang="ko-KR" altLang="en-US" sz="900">
+              <a:solidFill>
+                <a:srgbClr val="f2f2f2"/>
+              </a:solidFill>
+            </a:endParaRPr>
+          </a:p>
+        </p:txBody>
+      </p:sp>
     </p:spTree>
     <p:extLst>
       <p:ext uri="{BB962C8B-B14F-4D97-AF65-F5344CB8AC3E}">
@@ -24720,7 +25355,7 @@
 </file>
 
 <file path=ppt/slides/slide9.xml><?xml version="1.0" encoding="utf-8"?>
-<p:sld xmlns:a="http://schemas.openxmlformats.org/drawingml/2006/main" xmlns:r="http://schemas.openxmlformats.org/officeDocument/2006/relationships" xmlns:p="http://schemas.openxmlformats.org/presentationml/2006/main">
+<p:sld xmlns:r="http://schemas.openxmlformats.org/officeDocument/2006/relationships" xmlns:c="http://schemas.openxmlformats.org/drawingml/2006/chart" xmlns:a="http://schemas.openxmlformats.org/drawingml/2006/main" xmlns:dgm="http://schemas.openxmlformats.org/drawingml/2006/diagram" xmlns:dsp="http://schemas.microsoft.com/office/drawing/2008/diagram" xmlns:p="http://schemas.openxmlformats.org/presentationml/2006/main">
   <p:cSld>
     <p:spTree>
       <p:nvGrpSpPr>
@@ -25030,7 +25665,7 @@
           <p:nvPr/>
         </p:nvPicPr>
         <p:blipFill rotWithShape="1">
-          <a:blip r:embed="rId3"/>
+          <a:blip r:embed="rId5"/>
           <a:srcRect b="50000"/>
           <a:stretch>
             <a:fillRect/>
@@ -25055,7 +25690,7 @@
           <p:nvPr/>
         </p:nvPicPr>
         <p:blipFill rotWithShape="1">
-          <a:blip r:embed="rId5"/>
+          <a:blip r:embed="rId6"/>
           <a:stretch>
             <a:fillRect/>
           </a:stretch>
@@ -25115,6 +25750,61 @@
               </a:rPr>
               <a:t>누가 남을까?</a:t>
             </a:r>
+          </a:p>
+        </p:txBody>
+      </p:sp>
+      <p:sp>
+        <p:nvSpPr>
+          <p:cNvPr id="22" name="가로 글상자 21"/>
+          <p:cNvSpPr txBox="1"/>
+          <p:nvPr/>
+        </p:nvSpPr>
+        <p:spPr>
+          <a:xfrm>
+            <a:off x="10586085" y="6231011"/>
+            <a:ext cx="1407478" cy="222176"/>
+          </a:xfrm>
+          <a:prstGeom prst="rect">
+            <a:avLst/>
+          </a:prstGeom>
+        </p:spPr>
+        <p:txBody>
+          <a:bodyPr wrap="square">
+            <a:spAutoFit/>
+          </a:bodyPr>
+          <a:p>
+            <a:pPr lvl="0" algn="r">
+              <a:defRPr/>
+            </a:pPr>
+            <a:r>
+              <a:rPr lang="en-US" altLang="ko-KR" sz="900">
+                <a:solidFill>
+                  <a:srgbClr val="f2f2f2"/>
+                </a:solidFill>
+              </a:rPr>
+              <a:t>*</a:t>
+            </a:r>
+            <a:r>
+              <a:rPr lang="ko-KR" altLang="en-US" sz="900">
+                <a:solidFill>
+                  <a:srgbClr val="f2f2f2"/>
+                </a:solidFill>
+              </a:rPr>
+              <a:t>이미지 출처</a:t>
+            </a:r>
+            <a:r>
+              <a:rPr lang="en-US" altLang="ko-KR" sz="900">
+                <a:solidFill>
+                  <a:srgbClr val="f2f2f2"/>
+                </a:solidFill>
+              </a:rPr>
+              <a:t>:FLATICON</a:t>
+            </a:r>
+            <a:endParaRPr lang="ko-KR" altLang="en-US" sz="900">
+              <a:solidFill>
+                <a:srgbClr val="f2f2f2"/>
+              </a:solidFill>
+            </a:endParaRPr>
           </a:p>
         </p:txBody>
       </p:sp>

--- a/6차시_PPT.pptx
+++ b/6차시_PPT.pptx
@@ -15324,10 +15324,17 @@
             </a:endParaRPr>
           </a:p>
           <a:p>
-            <a:pPr lvl="0">
+            <a:pPr marL="0" marR="0" lvl="0" indent="0" algn="l" rtl="0">
               <a:lnSpc>
                 <a:spcPct val="120000"/>
               </a:lnSpc>
+              <a:spcBef>
+                <a:spcPts val="0"/>
+              </a:spcBef>
+              <a:spcAft>
+                <a:spcPts val="0"/>
+              </a:spcAft>
+              <a:buNone/>
               <a:defRPr/>
             </a:pPr>
             <a:r>
@@ -15401,7 +15408,27 @@
               </a:rPr>
               <a:t>)</a:t>
             </a:r>
-            <a:endParaRPr lang="en-US" altLang="ko-KR" sz="2400">
+            <a:r>
+              <a:rPr lang="ko-KR" altLang="en-US" sz="1600" b="0" i="0" u="none" strike="noStrike" cap="none">
+                <a:solidFill>
+                  <a:schemeClr val="dk1"/>
+                </a:solidFill>
+                <a:latin typeface="나눔고딕"/>
+                <a:ea typeface="나눔고딕"/>
+              </a:rPr>
+              <a:t> 비밀번호 </a:t>
+            </a:r>
+            <a:r>
+              <a:rPr lang="en-US" altLang="ko-KR" sz="1600" b="0" i="0" u="none" strike="noStrike" cap="none">
+                <a:solidFill>
+                  <a:schemeClr val="dk1"/>
+                </a:solidFill>
+                <a:latin typeface="나눔고딕"/>
+                <a:ea typeface="나눔고딕"/>
+              </a:rPr>
+              <a:t>2026</a:t>
+            </a:r>
+            <a:endParaRPr lang="en-US" altLang="ko-KR" sz="1600">
               <a:solidFill>
                 <a:schemeClr val="tx1"/>
               </a:solidFill>
